--- a/yunqi-2026-pai-forum/docs/洞察一页-10-费莫一科技 × 穹彻智能 × 流形空间 × 阿里云：具身.pptx
+++ b/yunqi-2026-pai-forum/docs/洞察一页-10-费莫一科技 × 穹彻智能 × 流形空间 × 阿里云：具身.pptx
@@ -3141,7 +3141,7 @@
         <p:spPr>
           <a:xfrm>
             <a:off x="0" y="0"/>
-            <a:ext cx="12191695" cy="1051560"/>
+            <a:ext cx="12191695" cy="1097280"/>
           </a:xfrm>
           <a:prstGeom prst="rect">
             <a:avLst/>
@@ -3183,8 +3183,8 @@
         </p:nvSpPr>
         <p:spPr>
           <a:xfrm>
-            <a:off x="365760" y="146304"/>
-            <a:ext cx="11430000" cy="274320"/>
+            <a:off x="320040" y="91440"/>
+            <a:ext cx="11521440" cy="237744"/>
           </a:xfrm>
           <a:prstGeom prst="rect">
             <a:avLst/>
@@ -3199,7 +3199,7 @@
           <a:p>
             <a:pPr algn="l"/>
             <a:r>
-              <a:rPr sz="1300" b="0">
+              <a:rPr sz="1200" b="0">
                 <a:solidFill>
                   <a:srgbClr val="6B6B6B"/>
                 </a:solidFill>
@@ -3219,8 +3219,8 @@
         </p:nvSpPr>
         <p:spPr>
           <a:xfrm>
-            <a:off x="365760" y="420624"/>
-            <a:ext cx="11430000" cy="502920"/>
+            <a:off x="320040" y="347472"/>
+            <a:ext cx="11521440" cy="658368"/>
           </a:xfrm>
           <a:prstGeom prst="rect">
             <a:avLst/>
@@ -3235,14 +3235,14 @@
           <a:p>
             <a:pPr algn="l"/>
             <a:r>
-              <a:rPr sz="2000" b="1">
+              <a:rPr sz="1600" b="1">
                 <a:solidFill>
                   <a:srgbClr val="1A1A1A"/>
                 </a:solidFill>
                 <a:latin typeface="Microsoft YaHei"/>
                 <a:ea typeface="Microsoft YaHei"/>
               </a:rPr>
-              <a:t>洞察：圆桌把PAI Physical AI从产品发布延伸为生态对话：Agent、数据管线、世界模型三…</a:t>
+              <a:t>洞察：圆桌把PAI Physical AI从产品发布延伸为生态对话：Agent、数据管线、世界模型三类创业路径并列。</a:t>
             </a:r>
           </a:p>
         </p:txBody>
@@ -3255,8 +3255,8 @@
         </p:nvSpPr>
         <p:spPr>
           <a:xfrm>
-            <a:off x="320040" y="1207008"/>
-            <a:ext cx="11521440" cy="502920"/>
+            <a:off x="274320" y="1207008"/>
+            <a:ext cx="11612880" cy="749808"/>
           </a:xfrm>
           <a:prstGeom prst="rect">
             <a:avLst/>
@@ -3300,8 +3300,8 @@
         </p:nvSpPr>
         <p:spPr>
           <a:xfrm>
-            <a:off x="457200" y="1298448"/>
-            <a:ext cx="11247120" cy="365760"/>
+            <a:off x="411480" y="1261872"/>
+            <a:ext cx="11338560" cy="640080"/>
           </a:xfrm>
           <a:prstGeom prst="rect">
             <a:avLst/>
@@ -3316,14 +3316,14 @@
           <a:p>
             <a:pPr algn="l"/>
             <a:r>
-              <a:rPr sz="1300" b="1">
+              <a:rPr sz="1200" b="1">
                 <a:solidFill>
                   <a:srgbClr val="1A1A1A"/>
                 </a:solidFill>
                 <a:latin typeface="Microsoft YaHei"/>
                 <a:ea typeface="Microsoft YaHei"/>
               </a:rPr>
-              <a:t>一句话判断：圆桌由阿里云智能集团高级解决方案架构师曹志主持，邀请PHYMI费莫一科技创始人兼CEO刘念邱、穹彻智能AI科学家吕峻、流形空间（Manifold AI）创始人兼CEO武伟，围绕具身智能前沿展开对话。回放画面以嘉宾阵容与…</a:t>
+              <a:t>一句话判断：圆桌由阿里云智能集团高级解决方案架构师曹志主持，邀请PHYMI费莫一科技创始人兼CEO刘念邱、穹彻智能AI科学家吕峻、流形空间（Manifold AI）创始人兼CEO武伟，围绕具身智能前沿展开对话。</a:t>
             </a:r>
           </a:p>
         </p:txBody>
@@ -3336,8 +3336,8 @@
         </p:nvSpPr>
         <p:spPr>
           <a:xfrm>
-            <a:off x="320040" y="1874519"/>
-            <a:ext cx="3703320" cy="2606040"/>
+            <a:off x="274320" y="2084831"/>
+            <a:ext cx="3749039" cy="2267712"/>
           </a:xfrm>
           <a:prstGeom prst="rect">
             <a:avLst/>
@@ -3381,8 +3381,8 @@
         </p:nvSpPr>
         <p:spPr>
           <a:xfrm>
-            <a:off x="457200" y="2011679"/>
-            <a:ext cx="3429000" cy="320040"/>
+            <a:off x="402336" y="2176271"/>
+            <a:ext cx="3493007" cy="292608"/>
           </a:xfrm>
           <a:prstGeom prst="rect">
             <a:avLst/>
@@ -3397,14 +3397,14 @@
           <a:p>
             <a:pPr algn="l"/>
             <a:r>
-              <a:rPr sz="1500" b="1">
+              <a:rPr sz="1400" b="1">
                 <a:solidFill>
                   <a:srgbClr val="8B1A2B"/>
                 </a:solidFill>
                 <a:latin typeface="Microsoft YaHei"/>
                 <a:ea typeface="Microsoft YaHei"/>
               </a:rPr>
-              <a:t>01  圆桌定位与嘉宾阵容：云平台×三…</a:t>
+              <a:t>01  云平台×三家具身创业公司</a:t>
             </a:r>
           </a:p>
         </p:txBody>
@@ -3417,8 +3417,8 @@
         </p:nvSpPr>
         <p:spPr>
           <a:xfrm>
-            <a:off x="484632" y="2377439"/>
-            <a:ext cx="3374136" cy="1965960"/>
+            <a:off x="402336" y="2487167"/>
+            <a:ext cx="3493007" cy="1764792"/>
           </a:xfrm>
           <a:prstGeom prst="rect">
             <a:avLst/>
@@ -3433,28 +3433,45 @@
           <a:p>
             <a:pPr algn="l">
               <a:spcAft>
-                <a:spcPts val="400"/>
+                <a:spcPts val="200"/>
               </a:spcAft>
             </a:pPr>
             <a:r>
-              <a:rPr sz="1200" b="1">
+              <a:rPr sz="1100" b="1">
                 <a:solidFill>
                   <a:srgbClr val="1A1A1A"/>
                 </a:solidFill>
                 <a:latin typeface="Microsoft YaHei"/>
                 <a:ea typeface="Microsoft YaHei"/>
               </a:rPr>
-              <a:t>中英双语主题：FermiOne Technology × Noematrix × …</a:t>
+              <a:t>具身智能对外叙事宜采用「平台方主持 + 垂直创业公司并列」结构，同时覆盖基础设施、Agent产品与算法科学视角。</a:t>
             </a:r>
           </a:p>
           <a:p>
             <a:pPr algn="l">
               <a:spcAft>
-                <a:spcPts val="400"/>
+                <a:spcPts val="200"/>
               </a:spcAft>
             </a:pPr>
             <a:r>
-              <a:rPr sz="1200" b="0">
+              <a:rPr sz="1100" b="0">
+                <a:solidFill>
+                  <a:srgbClr val="4A4A4A"/>
+                </a:solidFill>
+                <a:latin typeface="Microsoft YaHei"/>
+                <a:ea typeface="Microsoft YaHei"/>
+              </a:rPr>
+              <a:t>• 中英双语主题：FermiOne Technology × Noematrix × Manifold AI × Alibaba Cloud: Frontier Dialogue on Embodied AI</a:t>
+            </a:r>
+          </a:p>
+          <a:p>
+            <a:pPr algn="l">
+              <a:spcAft>
+                <a:spcPts val="200"/>
+              </a:spcAft>
+            </a:pPr>
+            <a:r>
+              <a:rPr sz="1100" b="0">
                 <a:solidFill>
                   <a:srgbClr val="4A4A4A"/>
                 </a:solidFill>
@@ -3467,11 +3484,11 @@
           <a:p>
             <a:pPr algn="l">
               <a:spcAft>
-                <a:spcPts val="400"/>
+                <a:spcPts val="200"/>
               </a:spcAft>
             </a:pPr>
             <a:r>
-              <a:rPr sz="1200" b="0">
+              <a:rPr sz="1100" b="0">
                 <a:solidFill>
                   <a:srgbClr val="4A4A4A"/>
                 </a:solidFill>
@@ -3481,23 +3498,6 @@
               <a:t>• 刘念邱：PHYMI费莫一科技创始人兼CEO。</a:t>
             </a:r>
           </a:p>
-          <a:p>
-            <a:pPr algn="l">
-              <a:spcAft>
-                <a:spcPts val="400"/>
-              </a:spcAft>
-            </a:pPr>
-            <a:r>
-              <a:rPr sz="1200" b="0">
-                <a:solidFill>
-                  <a:srgbClr val="4A4A4A"/>
-                </a:solidFill>
-                <a:latin typeface="Microsoft YaHei"/>
-                <a:ea typeface="Microsoft YaHei"/>
-              </a:rPr>
-              <a:t>• 吕峻：穹彻智能AI科学家；武伟：Manifold AI（流形空间）创始人兼CEO。</a:t>
-            </a:r>
-          </a:p>
         </p:txBody>
       </p:sp>
       <p:sp>
@@ -3508,8 +3508,8 @@
         </p:nvSpPr>
         <p:spPr>
           <a:xfrm>
-            <a:off x="4224528" y="1874519"/>
-            <a:ext cx="3703320" cy="2606040"/>
+            <a:off x="4187951" y="2084831"/>
+            <a:ext cx="3749039" cy="2267712"/>
           </a:xfrm>
           <a:prstGeom prst="rect">
             <a:avLst/>
@@ -3553,8 +3553,8 @@
         </p:nvSpPr>
         <p:spPr>
           <a:xfrm>
-            <a:off x="4361688" y="2011679"/>
-            <a:ext cx="3429000" cy="320040"/>
+            <a:off x="4315967" y="2176271"/>
+            <a:ext cx="3493007" cy="292608"/>
           </a:xfrm>
           <a:prstGeom prst="rect">
             <a:avLst/>
@@ -3569,14 +3569,14 @@
           <a:p>
             <a:pPr algn="l"/>
             <a:r>
-              <a:rPr sz="1500" b="1">
+              <a:rPr sz="1400" b="1">
                 <a:solidFill>
                   <a:srgbClr val="8B1A2B"/>
                 </a:solidFill>
                 <a:latin typeface="Microsoft YaHei"/>
                 <a:ea typeface="Microsoft YaHei"/>
               </a:rPr>
-              <a:t>02  费莫一科技：面向开放动态真实世…</a:t>
+              <a:t>02  费莫一科技</a:t>
             </a:r>
           </a:p>
         </p:txBody>
@@ -3589,8 +3589,8 @@
         </p:nvSpPr>
         <p:spPr>
           <a:xfrm>
-            <a:off x="4389120" y="2377439"/>
-            <a:ext cx="3374136" cy="1965960"/>
+            <a:off x="4315967" y="2487167"/>
+            <a:ext cx="3493007" cy="1764792"/>
           </a:xfrm>
           <a:prstGeom prst="rect">
             <a:avLst/>
@@ -3605,28 +3605,45 @@
           <a:p>
             <a:pPr algn="l">
               <a:spcAft>
-                <a:spcPts val="400"/>
+                <a:spcPts val="200"/>
               </a:spcAft>
             </a:pPr>
             <a:r>
-              <a:rPr sz="1200" b="1">
+              <a:rPr sz="1100" b="1">
                 <a:solidFill>
                   <a:srgbClr val="1A1A1A"/>
                 </a:solidFill>
                 <a:latin typeface="Microsoft YaHei"/>
                 <a:ea typeface="Microsoft YaHei"/>
               </a:rPr>
-              <a:t>刘念邱作为PHYMI费莫一科技创始人兼CEO参与圆桌，代表创业公司侧的Physic…</a:t>
+              <a:t>云厂商应挑选能讲清真实世界任务闭环的Agent创业公司做联合叙事，避免只有开源模型列表没有落地角色。</a:t>
             </a:r>
           </a:p>
           <a:p>
             <a:pPr algn="l">
               <a:spcAft>
-                <a:spcPts val="400"/>
+                <a:spcPts val="200"/>
               </a:spcAft>
             </a:pPr>
             <a:r>
-              <a:rPr sz="1200" b="0">
+              <a:rPr sz="1100" b="0">
+                <a:solidFill>
+                  <a:srgbClr val="4A4A4A"/>
+                </a:solidFill>
+                <a:latin typeface="Microsoft YaHei"/>
+                <a:ea typeface="Microsoft YaHei"/>
+              </a:rPr>
+              <a:t>• 刘念邱作为PHYMI费莫一科技创始人兼CEO参与圆桌，代表创业公司侧的Physical Agent产品路径。</a:t>
+            </a:r>
+          </a:p>
+          <a:p>
+            <a:pPr algn="l">
+              <a:spcAft>
+                <a:spcPts val="200"/>
+              </a:spcAft>
+            </a:pPr>
+            <a:r>
+              <a:rPr sz="1100" b="0">
                 <a:solidFill>
                   <a:srgbClr val="4A4A4A"/>
                 </a:solidFill>
@@ -3639,18 +3656,18 @@
           <a:p>
             <a:pPr algn="l">
               <a:spcAft>
-                <a:spcPts val="400"/>
+                <a:spcPts val="200"/>
               </a:spcAft>
             </a:pPr>
             <a:r>
-              <a:rPr sz="1200" b="0">
+              <a:rPr sz="1100" b="0">
                 <a:solidFill>
                   <a:srgbClr val="4A4A4A"/>
                 </a:solidFill>
                 <a:latin typeface="Microsoft YaHei"/>
                 <a:ea typeface="Microsoft YaHei"/>
               </a:rPr>
-              <a:t>• 圆桌语境下与PAI Physical AI全栈（数据—训练—评测—部署）形成「平台能力 × 垂直Agent团队」组合。</a:t>
+              <a:t>• 圆桌语境下与PAI Physical AI全栈（数据—训练—评测—部署）形成「平台能力 × 垂直Agent团队」组合</a:t>
             </a:r>
           </a:p>
         </p:txBody>
@@ -3663,8 +3680,8 @@
         </p:nvSpPr>
         <p:spPr>
           <a:xfrm>
-            <a:off x="8129016" y="1874519"/>
-            <a:ext cx="3703320" cy="2606040"/>
+            <a:off x="8101582" y="2084831"/>
+            <a:ext cx="3749039" cy="2267712"/>
           </a:xfrm>
           <a:prstGeom prst="rect">
             <a:avLst/>
@@ -3708,8 +3725,8 @@
         </p:nvSpPr>
         <p:spPr>
           <a:xfrm>
-            <a:off x="8266176" y="2011679"/>
-            <a:ext cx="3429000" cy="320040"/>
+            <a:off x="8229598" y="2176271"/>
+            <a:ext cx="3493007" cy="292608"/>
           </a:xfrm>
           <a:prstGeom prst="rect">
             <a:avLst/>
@@ -3724,14 +3741,14 @@
           <a:p>
             <a:pPr algn="l"/>
             <a:r>
-              <a:rPr sz="1500" b="1">
+              <a:rPr sz="1400" b="1">
                 <a:solidFill>
                   <a:srgbClr val="8B1A2B"/>
                 </a:solidFill>
                 <a:latin typeface="Microsoft YaHei"/>
                 <a:ea typeface="Microsoft YaHei"/>
               </a:rPr>
-              <a:t>03  穹彻智能：数据与AI管线视角的…</a:t>
+              <a:t>03  数据与AI管线视角的具身落地</a:t>
             </a:r>
           </a:p>
         </p:txBody>
@@ -3744,8 +3761,8 @@
         </p:nvSpPr>
         <p:spPr>
           <a:xfrm>
-            <a:off x="8293608" y="2377439"/>
-            <a:ext cx="3374136" cy="1965960"/>
+            <a:off x="8229598" y="2487167"/>
+            <a:ext cx="3493007" cy="1764792"/>
           </a:xfrm>
           <a:prstGeom prst="rect">
             <a:avLst/>
@@ -3760,28 +3777,45 @@
           <a:p>
             <a:pPr algn="l">
               <a:spcAft>
-                <a:spcPts val="400"/>
+                <a:spcPts val="200"/>
               </a:spcAft>
             </a:pPr>
             <a:r>
-              <a:rPr sz="1200" b="1">
+              <a:rPr sz="1100" b="1">
                 <a:solidFill>
                   <a:srgbClr val="1A1A1A"/>
                 </a:solidFill>
                 <a:latin typeface="Microsoft YaHei"/>
                 <a:ea typeface="Microsoft YaHei"/>
               </a:rPr>
-              <a:t>吕峻以穹彻智能AI科学家身份发言，代表数据与模型管线侧的专业视角。</a:t>
+              <a:t>具身生态合作应显式邀请数据/管线专家，而不只是机器人整机厂商</a:t>
             </a:r>
           </a:p>
           <a:p>
             <a:pPr algn="l">
               <a:spcAft>
-                <a:spcPts val="400"/>
+                <a:spcPts val="200"/>
               </a:spcAft>
             </a:pPr>
             <a:r>
-              <a:rPr sz="1200" b="0">
+              <a:rPr sz="1100" b="0">
+                <a:solidFill>
+                  <a:srgbClr val="4A4A4A"/>
+                </a:solidFill>
+                <a:latin typeface="Microsoft YaHei"/>
+                <a:ea typeface="Microsoft YaHei"/>
+              </a:rPr>
+              <a:t>• 吕峻以穹彻智能AI科学家身份发言，代表数据与模型管线侧的专业视角。</a:t>
+            </a:r>
+          </a:p>
+          <a:p>
+            <a:pPr algn="l">
+              <a:spcAft>
+                <a:spcPts val="200"/>
+              </a:spcAft>
+            </a:pPr>
+            <a:r>
+              <a:rPr sz="1100" b="0">
                 <a:solidFill>
                   <a:srgbClr val="4A4A4A"/>
                 </a:solidFill>
@@ -3794,11 +3828,11 @@
           <a:p>
             <a:pPr algn="l">
               <a:spcAft>
-                <a:spcPts val="400"/>
+                <a:spcPts val="200"/>
               </a:spcAft>
             </a:pPr>
             <a:r>
-              <a:rPr sz="1200" b="0">
+              <a:rPr sz="1100" b="0">
                 <a:solidFill>
                   <a:srgbClr val="4A4A4A"/>
                 </a:solidFill>
@@ -3818,8 +3852,8 @@
         </p:nvSpPr>
         <p:spPr>
           <a:xfrm>
-            <a:off x="320040" y="4617720"/>
-            <a:ext cx="7315200" cy="256032"/>
+            <a:off x="274320" y="4553712"/>
+            <a:ext cx="7315200" cy="237744"/>
           </a:xfrm>
           <a:prstGeom prst="rect">
             <a:avLst/>
@@ -3834,7 +3868,7 @@
           <a:p>
             <a:pPr algn="l"/>
             <a:r>
-              <a:rPr sz="1400" b="1">
+              <a:rPr sz="1300" b="1">
                 <a:solidFill>
                   <a:srgbClr val="1A1A1A"/>
                 </a:solidFill>
@@ -3854,8 +3888,8 @@
         </p:nvSpPr>
         <p:spPr>
           <a:xfrm>
-            <a:off x="320040" y="4910328"/>
-            <a:ext cx="1847088" cy="868680"/>
+            <a:off x="274320" y="4809744"/>
+            <a:ext cx="1874519" cy="960120"/>
           </a:xfrm>
           <a:prstGeom prst="rect">
             <a:avLst/>
@@ -3899,8 +3933,8 @@
         </p:nvSpPr>
         <p:spPr>
           <a:xfrm>
-            <a:off x="429768" y="4965192"/>
-            <a:ext cx="1664208" cy="201168"/>
+            <a:off x="365760" y="4864608"/>
+            <a:ext cx="1709927" cy="201168"/>
           </a:xfrm>
           <a:prstGeom prst="rect">
             <a:avLst/>
@@ -3922,7 +3956,7 @@
                 <a:latin typeface="Microsoft YaHei"/>
                 <a:ea typeface="Microsoft YaHei"/>
               </a:rPr>
-              <a:t>圆桌定位与嘉宾阵容：云…</a:t>
+              <a:t>云平台×三家具身创业公司</a:t>
             </a:r>
           </a:p>
         </p:txBody>
@@ -3935,8 +3969,8 @@
         </p:nvSpPr>
         <p:spPr>
           <a:xfrm>
-            <a:off x="429768" y="5166360"/>
-            <a:ext cx="1664208" cy="237744"/>
+            <a:off x="365760" y="5065776"/>
+            <a:ext cx="1709927" cy="256032"/>
           </a:xfrm>
           <a:prstGeom prst="rect">
             <a:avLst/>
@@ -3958,7 +3992,7 @@
                 <a:latin typeface="Microsoft YaHei"/>
                 <a:ea typeface="Microsoft YaHei"/>
               </a:rPr>
-              <a:t>中英双语主题：FermiOne…</a:t>
+              <a:t>核心口径</a:t>
             </a:r>
           </a:p>
         </p:txBody>
@@ -3971,8 +4005,8 @@
         </p:nvSpPr>
         <p:spPr>
           <a:xfrm>
-            <a:off x="429768" y="5413248"/>
-            <a:ext cx="1664208" cy="292608"/>
+            <a:off x="365760" y="5340096"/>
+            <a:ext cx="1709927" cy="365760"/>
           </a:xfrm>
           <a:prstGeom prst="rect">
             <a:avLst/>
@@ -3987,14 +4021,14 @@
           <a:p>
             <a:pPr algn="l"/>
             <a:r>
-              <a:rPr sz="1400" b="1">
+              <a:rPr sz="1200" b="1">
                 <a:solidFill>
                   <a:srgbClr val="8B1A2B"/>
                 </a:solidFill>
                 <a:latin typeface="Microsoft YaHei"/>
                 <a:ea typeface="Microsoft YaHei"/>
               </a:rPr>
-              <a:t>中英双语主题：FermiO…</a:t>
+              <a:t>中英双语主题：FermiOne Technology × Noematrix × Manifold AI × Alibaba Cloud: Frontier Dialogue on Embodied AI。</a:t>
             </a:r>
           </a:p>
         </p:txBody>
@@ -4007,8 +4041,8 @@
         </p:nvSpPr>
         <p:spPr>
           <a:xfrm>
-            <a:off x="2276856" y="4910328"/>
-            <a:ext cx="1847088" cy="868680"/>
+            <a:off x="2240279" y="4809744"/>
+            <a:ext cx="1874519" cy="960120"/>
           </a:xfrm>
           <a:prstGeom prst="rect">
             <a:avLst/>
@@ -4052,8 +4086,8 @@
         </p:nvSpPr>
         <p:spPr>
           <a:xfrm>
-            <a:off x="2386584" y="4965192"/>
-            <a:ext cx="1664208" cy="201168"/>
+            <a:off x="2331719" y="4864608"/>
+            <a:ext cx="1709927" cy="201168"/>
           </a:xfrm>
           <a:prstGeom prst="rect">
             <a:avLst/>
@@ -4075,7 +4109,7 @@
                 <a:latin typeface="Microsoft YaHei"/>
                 <a:ea typeface="Microsoft YaHei"/>
               </a:rPr>
-              <a:t>费莫一科技：面向开放动…</a:t>
+              <a:t>费莫一科技</a:t>
             </a:r>
           </a:p>
         </p:txBody>
@@ -4088,8 +4122,8 @@
         </p:nvSpPr>
         <p:spPr>
           <a:xfrm>
-            <a:off x="2386584" y="5166360"/>
-            <a:ext cx="1664208" cy="237744"/>
+            <a:off x="2331719" y="5065776"/>
+            <a:ext cx="1709927" cy="256032"/>
           </a:xfrm>
           <a:prstGeom prst="rect">
             <a:avLst/>
@@ -4111,7 +4145,7 @@
                 <a:latin typeface="Microsoft YaHei"/>
                 <a:ea typeface="Microsoft YaHei"/>
               </a:rPr>
-              <a:t>刘念邱作为PHYMI费莫一科技…</a:t>
+              <a:t>核心口径</a:t>
             </a:r>
           </a:p>
         </p:txBody>
@@ -4124,8 +4158,8 @@
         </p:nvSpPr>
         <p:spPr>
           <a:xfrm>
-            <a:off x="2386584" y="5413248"/>
-            <a:ext cx="1664208" cy="292608"/>
+            <a:off x="2331719" y="5340096"/>
+            <a:ext cx="1709927" cy="365760"/>
           </a:xfrm>
           <a:prstGeom prst="rect">
             <a:avLst/>
@@ -4140,14 +4174,14 @@
           <a:p>
             <a:pPr algn="l"/>
             <a:r>
-              <a:rPr sz="1400" b="1">
+              <a:rPr sz="1200" b="1">
                 <a:solidFill>
                   <a:srgbClr val="8B1A2B"/>
                 </a:solidFill>
                 <a:latin typeface="Microsoft YaHei"/>
                 <a:ea typeface="Microsoft YaHei"/>
               </a:rPr>
-              <a:t>刘念邱作为PHYMI费莫一…</a:t>
+              <a:t>刘念邱作为PHYMI费莫一科技创始人兼CEO参与圆桌</a:t>
             </a:r>
           </a:p>
         </p:txBody>
@@ -4160,8 +4194,8 @@
         </p:nvSpPr>
         <p:spPr>
           <a:xfrm>
-            <a:off x="4233672" y="4910328"/>
-            <a:ext cx="1847088" cy="868680"/>
+            <a:off x="4206238" y="4809744"/>
+            <a:ext cx="1874519" cy="960120"/>
           </a:xfrm>
           <a:prstGeom prst="rect">
             <a:avLst/>
@@ -4205,8 +4239,8 @@
         </p:nvSpPr>
         <p:spPr>
           <a:xfrm>
-            <a:off x="4343400" y="4965192"/>
-            <a:ext cx="1664208" cy="201168"/>
+            <a:off x="4297678" y="4864608"/>
+            <a:ext cx="1709927" cy="201168"/>
           </a:xfrm>
           <a:prstGeom prst="rect">
             <a:avLst/>
@@ -4228,7 +4262,7 @@
                 <a:latin typeface="Microsoft YaHei"/>
                 <a:ea typeface="Microsoft YaHei"/>
               </a:rPr>
-              <a:t>穹彻智能：数据与AI管…</a:t>
+              <a:t>穹彻智能</a:t>
             </a:r>
           </a:p>
         </p:txBody>
@@ -4241,8 +4275,8 @@
         </p:nvSpPr>
         <p:spPr>
           <a:xfrm>
-            <a:off x="4343400" y="5166360"/>
-            <a:ext cx="1664208" cy="237744"/>
+            <a:off x="4297678" y="5065776"/>
+            <a:ext cx="1709927" cy="256032"/>
           </a:xfrm>
           <a:prstGeom prst="rect">
             <a:avLst/>
@@ -4264,7 +4298,7 @@
                 <a:latin typeface="Microsoft YaHei"/>
                 <a:ea typeface="Microsoft YaHei"/>
               </a:rPr>
-              <a:t>吕峻以穹彻智能AI科学家身份发…</a:t>
+              <a:t>核心口径</a:t>
             </a:r>
           </a:p>
         </p:txBody>
@@ -4277,8 +4311,8 @@
         </p:nvSpPr>
         <p:spPr>
           <a:xfrm>
-            <a:off x="4343400" y="5413248"/>
-            <a:ext cx="1664208" cy="292608"/>
+            <a:off x="4297678" y="5340096"/>
+            <a:ext cx="1709927" cy="365760"/>
           </a:xfrm>
           <a:prstGeom prst="rect">
             <a:avLst/>
@@ -4293,14 +4327,14 @@
           <a:p>
             <a:pPr algn="l"/>
             <a:r>
-              <a:rPr sz="1400" b="1">
+              <a:rPr sz="1200" b="1">
                 <a:solidFill>
                   <a:srgbClr val="8B1A2B"/>
                 </a:solidFill>
                 <a:latin typeface="Microsoft YaHei"/>
                 <a:ea typeface="Microsoft YaHei"/>
               </a:rPr>
-              <a:t>吕峻以穹彻智能AI科学家身…</a:t>
+              <a:t>吕峻以穹彻智能AI科学家身份发言，代表数据与模型管线侧的专业视角。</a:t>
             </a:r>
           </a:p>
         </p:txBody>
@@ -4313,8 +4347,8 @@
         </p:nvSpPr>
         <p:spPr>
           <a:xfrm>
-            <a:off x="6190488" y="4910328"/>
-            <a:ext cx="1847088" cy="868680"/>
+            <a:off x="6172197" y="4809744"/>
+            <a:ext cx="1874519" cy="960120"/>
           </a:xfrm>
           <a:prstGeom prst="rect">
             <a:avLst/>
@@ -4358,8 +4392,8 @@
         </p:nvSpPr>
         <p:spPr>
           <a:xfrm>
-            <a:off x="6300216" y="4965192"/>
-            <a:ext cx="1664208" cy="201168"/>
+            <a:off x="6263637" y="4864608"/>
+            <a:ext cx="1709927" cy="201168"/>
           </a:xfrm>
           <a:prstGeom prst="rect">
             <a:avLst/>
@@ -4381,7 +4415,7 @@
                 <a:latin typeface="Microsoft YaHei"/>
                 <a:ea typeface="Microsoft YaHei"/>
               </a:rPr>
-              <a:t>流形空间：世界模型与云…</a:t>
+              <a:t>世界模型与云上训练侧协同</a:t>
             </a:r>
           </a:p>
         </p:txBody>
@@ -4394,8 +4428,8 @@
         </p:nvSpPr>
         <p:spPr>
           <a:xfrm>
-            <a:off x="6300216" y="5166360"/>
-            <a:ext cx="1664208" cy="237744"/>
+            <a:off x="6263637" y="5065776"/>
+            <a:ext cx="1709927" cy="256032"/>
           </a:xfrm>
           <a:prstGeom prst="rect">
             <a:avLst/>
@@ -4417,7 +4451,7 @@
                 <a:latin typeface="Microsoft YaHei"/>
                 <a:ea typeface="Microsoft YaHei"/>
               </a:rPr>
-              <a:t>武伟作为Manifold AI…</a:t>
+              <a:t>核心口径</a:t>
             </a:r>
           </a:p>
         </p:txBody>
@@ -4430,8 +4464,8 @@
         </p:nvSpPr>
         <p:spPr>
           <a:xfrm>
-            <a:off x="6300216" y="5413248"/>
-            <a:ext cx="1664208" cy="292608"/>
+            <a:off x="6263637" y="5340096"/>
+            <a:ext cx="1709927" cy="365760"/>
           </a:xfrm>
           <a:prstGeom prst="rect">
             <a:avLst/>
@@ -4446,14 +4480,14 @@
           <a:p>
             <a:pPr algn="l"/>
             <a:r>
-              <a:rPr sz="1400" b="1">
+              <a:rPr sz="1200" b="1">
                 <a:solidFill>
                   <a:srgbClr val="8B1A2B"/>
                 </a:solidFill>
                 <a:latin typeface="Microsoft YaHei"/>
                 <a:ea typeface="Microsoft YaHei"/>
               </a:rPr>
-              <a:t>武伟作为Manifold …</a:t>
+              <a:t>武伟作为Manifold AI（流形空间）创始人兼CEO参与，侧重世界模型/空间智能与云训练协同。</a:t>
             </a:r>
           </a:p>
         </p:txBody>
@@ -4466,8 +4500,8 @@
         </p:nvSpPr>
         <p:spPr>
           <a:xfrm>
-            <a:off x="8147304" y="4910328"/>
-            <a:ext cx="1847088" cy="868680"/>
+            <a:off x="8138156" y="4809744"/>
+            <a:ext cx="1874519" cy="960120"/>
           </a:xfrm>
           <a:prstGeom prst="rect">
             <a:avLst/>
@@ -4511,8 +4545,8 @@
         </p:nvSpPr>
         <p:spPr>
           <a:xfrm>
-            <a:off x="8257032" y="4965192"/>
-            <a:ext cx="1664208" cy="201168"/>
+            <a:off x="8229596" y="4864608"/>
+            <a:ext cx="1709927" cy="201168"/>
           </a:xfrm>
           <a:prstGeom prst="rect">
             <a:avLst/>
@@ -4534,7 +4568,7 @@
                 <a:latin typeface="Microsoft YaHei"/>
                 <a:ea typeface="Microsoft YaHei"/>
               </a:rPr>
-              <a:t>主持与现场互动：从发布…</a:t>
+              <a:t>从发布到开放问答的转换</a:t>
             </a:r>
           </a:p>
         </p:txBody>
@@ -4547,8 +4581,8 @@
         </p:nvSpPr>
         <p:spPr>
           <a:xfrm>
-            <a:off x="8257032" y="5166360"/>
-            <a:ext cx="1664208" cy="237744"/>
+            <a:off x="8229596" y="5065776"/>
+            <a:ext cx="1709927" cy="256032"/>
           </a:xfrm>
           <a:prstGeom prst="rect">
             <a:avLst/>
@@ -4570,7 +4604,7 @@
                 <a:latin typeface="Microsoft YaHei"/>
                 <a:ea typeface="Microsoft YaHei"/>
               </a:rPr>
-              <a:t>现场四人同台坐谈，曹志持麦主持…</a:t>
+              <a:t>核心口径</a:t>
             </a:r>
           </a:p>
         </p:txBody>
@@ -4583,8 +4617,8 @@
         </p:nvSpPr>
         <p:spPr>
           <a:xfrm>
-            <a:off x="8257032" y="5413248"/>
-            <a:ext cx="1664208" cy="292608"/>
+            <a:off x="8229596" y="5340096"/>
+            <a:ext cx="1709927" cy="365760"/>
           </a:xfrm>
           <a:prstGeom prst="rect">
             <a:avLst/>
@@ -4599,14 +4633,14 @@
           <a:p>
             <a:pPr algn="l"/>
             <a:r>
-              <a:rPr sz="1400" b="1">
+              <a:rPr sz="1200" b="1">
                 <a:solidFill>
                   <a:srgbClr val="8B1A2B"/>
                 </a:solidFill>
                 <a:latin typeface="Microsoft YaHei"/>
                 <a:ea typeface="Microsoft YaHei"/>
               </a:rPr>
-              <a:t>现场四人同台坐谈，曹志持麦…</a:t>
+              <a:t>现场四人同台坐谈，曹志持麦主持，其他嘉宾轮流发言</a:t>
             </a:r>
           </a:p>
         </p:txBody>
@@ -4619,8 +4653,8 @@
         </p:nvSpPr>
         <p:spPr>
           <a:xfrm>
-            <a:off x="10104120" y="4910328"/>
-            <a:ext cx="1847088" cy="868680"/>
+            <a:off x="10104115" y="4809744"/>
+            <a:ext cx="1874519" cy="960120"/>
           </a:xfrm>
           <a:prstGeom prst="rect">
             <a:avLst/>
@@ -4664,8 +4698,8 @@
         </p:nvSpPr>
         <p:spPr>
           <a:xfrm>
-            <a:off x="10213848" y="4965192"/>
-            <a:ext cx="1664208" cy="201168"/>
+            <a:off x="10195555" y="4864608"/>
+            <a:ext cx="1709927" cy="201168"/>
           </a:xfrm>
           <a:prstGeom prst="rect">
             <a:avLst/>
@@ -4687,7 +4721,7 @@
                 <a:latin typeface="Microsoft YaHei"/>
                 <a:ea typeface="Microsoft YaHei"/>
               </a:rPr>
-              <a:t>生态启示：Physic…</a:t>
+              <a:t>生态启示</a:t>
             </a:r>
           </a:p>
         </p:txBody>
@@ -4700,8 +4734,8 @@
         </p:nvSpPr>
         <p:spPr>
           <a:xfrm>
-            <a:off x="10213848" y="5166360"/>
-            <a:ext cx="1664208" cy="237744"/>
+            <a:off x="10195555" y="5065776"/>
+            <a:ext cx="1709927" cy="256032"/>
           </a:xfrm>
           <a:prstGeom prst="rect">
             <a:avLst/>
@@ -4723,7 +4757,7 @@
                 <a:latin typeface="Microsoft YaHei"/>
                 <a:ea typeface="Microsoft YaHei"/>
               </a:rPr>
-              <a:t>四方结构覆盖云基础设施、Phy…</a:t>
+              <a:t>核心口径</a:t>
             </a:r>
           </a:p>
         </p:txBody>
@@ -4736,8 +4770,8 @@
         </p:nvSpPr>
         <p:spPr>
           <a:xfrm>
-            <a:off x="10213848" y="5413248"/>
-            <a:ext cx="1664208" cy="292608"/>
+            <a:off x="10195555" y="5340096"/>
+            <a:ext cx="1709927" cy="365760"/>
           </a:xfrm>
           <a:prstGeom prst="rect">
             <a:avLst/>
@@ -4752,14 +4786,14 @@
           <a:p>
             <a:pPr algn="l"/>
             <a:r>
-              <a:rPr sz="1400" b="1">
+              <a:rPr sz="1200" b="1">
                 <a:solidFill>
                   <a:srgbClr val="8B1A2B"/>
                 </a:solidFill>
                 <a:latin typeface="Microsoft YaHei"/>
                 <a:ea typeface="Microsoft YaHei"/>
               </a:rPr>
-              <a:t>四方结构覆盖云基础设施、P…</a:t>
+              <a:t>四方结构覆盖云基础设施、Physical Agent、数据/AI科学、世界模型创业路径。</a:t>
             </a:r>
           </a:p>
         </p:txBody>
@@ -4772,8 +4806,8 @@
         </p:nvSpPr>
         <p:spPr>
           <a:xfrm>
-            <a:off x="0" y="5989320"/>
-            <a:ext cx="12191695" cy="868680"/>
+            <a:off x="0" y="5870448"/>
+            <a:ext cx="12191695" cy="987552"/>
           </a:xfrm>
           <a:prstGeom prst="rect">
             <a:avLst/>
@@ -4815,8 +4849,8 @@
         </p:nvSpPr>
         <p:spPr>
           <a:xfrm>
-            <a:off x="365760" y="6080760"/>
-            <a:ext cx="11430000" cy="256032"/>
+            <a:off x="320040" y="5943600"/>
+            <a:ext cx="11521440" cy="502920"/>
           </a:xfrm>
           <a:prstGeom prst="rect">
             <a:avLst/>
@@ -4831,14 +4865,14 @@
           <a:p>
             <a:pPr algn="l"/>
             <a:r>
-              <a:rPr sz="1200" b="1">
+              <a:rPr sz="1100" b="1">
                 <a:solidFill>
                   <a:srgbClr val="1A1A1A"/>
                 </a:solidFill>
                 <a:latin typeface="Microsoft YaHei"/>
                 <a:ea typeface="Microsoft YaHei"/>
               </a:rPr>
-              <a:t>可落地动作：圆桌把PAI Physical AI从产品发布延伸为生态对话：Agent、数据管线、世界模型三类创业路径并列。；回放画面以嘉宾阵容为主，技术细节更多依赖口述与同期全栈发布；价值在合作结构而非单页指标。</a:t>
+              <a:t>可落地动作：圆桌把PAI Physical AI从产品发布延伸为生态对话：Agent、数据管线、世界模型三类创业路径并列；回放画面以嘉宾阵容为主，技术细节更多依赖口述与同期全栈发布；价值在合作结构而非单页指标；对友商：用「平台能力 × 垂直标杆客户」组合讲述Physical AI，比单独堆叠开源模型列表更有说服力。</a:t>
             </a:r>
           </a:p>
         </p:txBody>
@@ -4851,8 +4885,8 @@
         </p:nvSpPr>
         <p:spPr>
           <a:xfrm>
-            <a:off x="365760" y="6373368"/>
-            <a:ext cx="11430000" cy="256032"/>
+            <a:off x="320040" y="6437376"/>
+            <a:ext cx="11521440" cy="256032"/>
           </a:xfrm>
           <a:prstGeom prst="rect">
             <a:avLst/>
@@ -4867,7 +4901,7 @@
           <a:p>
             <a:pPr algn="l"/>
             <a:r>
-              <a:rPr sz="1000" b="0">
+              <a:rPr sz="900" b="0">
                 <a:solidFill>
                   <a:srgbClr val="6B6B6B"/>
                 </a:solidFill>
@@ -5109,7 +5143,7 @@
         <p:spPr>
           <a:xfrm>
             <a:off x="429768" y="1143000"/>
-            <a:ext cx="3496970" cy="292608"/>
+            <a:ext cx="3496970" cy="384048"/>
           </a:xfrm>
           <a:prstGeom prst="rect">
             <a:avLst/>
@@ -5131,7 +5165,7 @@
                 <a:latin typeface="Microsoft YaHei"/>
                 <a:ea typeface="Microsoft YaHei"/>
               </a:rPr>
-              <a:t>圆桌定位与嘉宾阵容：云平台×三家具身创…</a:t>
+              <a:t>云平台×三家具身创业公司</a:t>
             </a:r>
           </a:p>
         </p:txBody>
@@ -5152,7 +5186,7 @@
         </p:blipFill>
         <p:spPr>
           <a:xfrm>
-            <a:off x="429768" y="1928092"/>
+            <a:off x="429768" y="1946380"/>
             <a:ext cx="3496970" cy="2965239"/>
           </a:xfrm>
           <a:prstGeom prst="rect">
@@ -5250,7 +5284,7 @@
         <p:spPr>
           <a:xfrm>
             <a:off x="4347362" y="1143000"/>
-            <a:ext cx="3496970" cy="292608"/>
+            <a:ext cx="3496970" cy="384048"/>
           </a:xfrm>
           <a:prstGeom prst="rect">
             <a:avLst/>
@@ -5272,7 +5306,7 @@
                 <a:latin typeface="Microsoft YaHei"/>
                 <a:ea typeface="Microsoft YaHei"/>
               </a:rPr>
-              <a:t>费莫一科技：面向开放动态真实世界的Ph…</a:t>
+              <a:t>费莫一科技</a:t>
             </a:r>
           </a:p>
         </p:txBody>
@@ -5293,7 +5327,7 @@
         </p:blipFill>
         <p:spPr>
           <a:xfrm>
-            <a:off x="4347362" y="1928092"/>
+            <a:off x="4347362" y="1946380"/>
             <a:ext cx="3496970" cy="2965239"/>
           </a:xfrm>
           <a:prstGeom prst="rect">
@@ -5332,7 +5366,7 @@
                 <a:latin typeface="Microsoft YaHei"/>
                 <a:ea typeface="Microsoft YaHei"/>
               </a:rPr>
-              <a:t>费莫一科技：面向开放动态真实世界的Physical A…</a:t>
+              <a:t>费莫一科技：面向开放动态真实世界的Physical Agent方向</a:t>
             </a:r>
           </a:p>
         </p:txBody>
@@ -5391,7 +5425,7 @@
         <p:spPr>
           <a:xfrm>
             <a:off x="8264956" y="1143000"/>
-            <a:ext cx="3496970" cy="292608"/>
+            <a:ext cx="3496970" cy="384048"/>
           </a:xfrm>
           <a:prstGeom prst="rect">
             <a:avLst/>
@@ -5413,7 +5447,7 @@
                 <a:latin typeface="Microsoft YaHei"/>
                 <a:ea typeface="Microsoft YaHei"/>
               </a:rPr>
-              <a:t>穹彻智能：数据与AI管线视角的具身落地</a:t>
+              <a:t>数据与AI管线视角的具身落地</a:t>
             </a:r>
           </a:p>
         </p:txBody>
@@ -5434,7 +5468,7 @@
         </p:blipFill>
         <p:spPr>
           <a:xfrm>
-            <a:off x="8264956" y="1928092"/>
+            <a:off x="8264956" y="1946380"/>
             <a:ext cx="3496970" cy="2965239"/>
           </a:xfrm>
           <a:prstGeom prst="rect">

--- a/yunqi-2026-pai-forum/docs/洞察一页-10-费莫一科技 × 穹彻智能 × 流形空间 × 阿里云：具身.pptx
+++ b/yunqi-2026-pai-forum/docs/洞察一页-10-费莫一科技 × 穹彻智能 × 流形空间 × 阿里云：具身.pptx
@@ -3323,7 +3323,7 @@
                 <a:latin typeface="Microsoft YaHei"/>
                 <a:ea typeface="Microsoft YaHei"/>
               </a:rPr>
-              <a:t>一句话判断：圆桌由阿里云智能集团高级解决方案架构师曹志主持，邀请PHYMI费莫一科技创始人兼CEO刘念邱、穹彻智能AI科学家吕峻、流形空间（Manifold AI）创始人兼CEO武伟，围绕具身智能前沿展开对话。</a:t>
+              <a:t>一句话判断：具身智能生态 Physical AI / PAI——围绕具身智能前沿展开对话。回放画面以嘉宾阵容与现场讨论为主；结合论坛Physical AI全栈发布语境，三家创业公司分别从Physical Agent、数据/模型管线、世界模型等方向与阿里云PAI能力对接，体现「云平台 + 垂直具身团队」协同落地。</a:t>
             </a:r>
           </a:p>
         </p:txBody>
@@ -3956,7 +3956,7 @@
                 <a:latin typeface="Microsoft YaHei"/>
                 <a:ea typeface="Microsoft YaHei"/>
               </a:rPr>
-              <a:t>云平台×三家具身创业公司</a:t>
+              <a:t>从发布到开放问答的转换</a:t>
             </a:r>
           </a:p>
         </p:txBody>
@@ -3992,7 +3992,7 @@
                 <a:latin typeface="Microsoft YaHei"/>
                 <a:ea typeface="Microsoft YaHei"/>
               </a:rPr>
-              <a:t>核心口径</a:t>
+              <a:t>关键能力</a:t>
             </a:r>
           </a:p>
         </p:txBody>
@@ -4028,7 +4028,7 @@
                 <a:latin typeface="Microsoft YaHei"/>
                 <a:ea typeface="Microsoft YaHei"/>
               </a:rPr>
-              <a:t>中英双语主题：FermiOne Technology × Noematrix × Manifold AI × Alibaba Cloud: Frontier Dialogue on Embodied AI。</a:t>
+              <a:t>现场四人同台坐谈，曹志持麦主持，其他嘉宾轮流发言</a:t>
             </a:r>
           </a:p>
         </p:txBody>
@@ -4109,7 +4109,7 @@
                 <a:latin typeface="Microsoft YaHei"/>
                 <a:ea typeface="Microsoft YaHei"/>
               </a:rPr>
-              <a:t>费莫一科技</a:t>
+              <a:t>穹彻智能</a:t>
             </a:r>
           </a:p>
         </p:txBody>
@@ -4145,7 +4145,7 @@
                 <a:latin typeface="Microsoft YaHei"/>
                 <a:ea typeface="Microsoft YaHei"/>
               </a:rPr>
-              <a:t>核心口径</a:t>
+              <a:t>关键能力</a:t>
             </a:r>
           </a:p>
         </p:txBody>
@@ -4181,7 +4181,7 @@
                 <a:latin typeface="Microsoft YaHei"/>
                 <a:ea typeface="Microsoft YaHei"/>
               </a:rPr>
-              <a:t>刘念邱作为PHYMI费莫一科技创始人兼CEO参与圆桌</a:t>
+              <a:t>吕峻以穹彻智能AI科学家身份发言，代表数据与模型管线侧的专业视角。</a:t>
             </a:r>
           </a:p>
         </p:txBody>
@@ -4262,7 +4262,7 @@
                 <a:latin typeface="Microsoft YaHei"/>
                 <a:ea typeface="Microsoft YaHei"/>
               </a:rPr>
-              <a:t>穹彻智能</a:t>
+              <a:t>生态启示</a:t>
             </a:r>
           </a:p>
         </p:txBody>
@@ -4298,7 +4298,7 @@
                 <a:latin typeface="Microsoft YaHei"/>
                 <a:ea typeface="Microsoft YaHei"/>
               </a:rPr>
-              <a:t>核心口径</a:t>
+              <a:t>关键能力</a:t>
             </a:r>
           </a:p>
         </p:txBody>
@@ -4334,7 +4334,7 @@
                 <a:latin typeface="Microsoft YaHei"/>
                 <a:ea typeface="Microsoft YaHei"/>
               </a:rPr>
-              <a:t>吕峻以穹彻智能AI科学家身份发言，代表数据与模型管线侧的专业视角。</a:t>
+              <a:t>四方结构覆盖云基础设施、Physical Agent、数据/AI科学、世界模型创业路径。</a:t>
             </a:r>
           </a:p>
         </p:txBody>
@@ -4451,7 +4451,7 @@
                 <a:latin typeface="Microsoft YaHei"/>
                 <a:ea typeface="Microsoft YaHei"/>
               </a:rPr>
-              <a:t>核心口径</a:t>
+              <a:t>关键能力</a:t>
             </a:r>
           </a:p>
         </p:txBody>
@@ -4568,7 +4568,7 @@
                 <a:latin typeface="Microsoft YaHei"/>
                 <a:ea typeface="Microsoft YaHei"/>
               </a:rPr>
-              <a:t>从发布到开放问答的转换</a:t>
+              <a:t>费莫一科技</a:t>
             </a:r>
           </a:p>
         </p:txBody>
@@ -4604,7 +4604,7 @@
                 <a:latin typeface="Microsoft YaHei"/>
                 <a:ea typeface="Microsoft YaHei"/>
               </a:rPr>
-              <a:t>核心口径</a:t>
+              <a:t>关键能力</a:t>
             </a:r>
           </a:p>
         </p:txBody>
@@ -4640,7 +4640,7 @@
                 <a:latin typeface="Microsoft YaHei"/>
                 <a:ea typeface="Microsoft YaHei"/>
               </a:rPr>
-              <a:t>现场四人同台坐谈，曹志持麦主持，其他嘉宾轮流发言</a:t>
+              <a:t>刘念邱作为PHYMI费莫一科技创始人兼CEO参与圆桌</a:t>
             </a:r>
           </a:p>
         </p:txBody>
@@ -4721,7 +4721,7 @@
                 <a:latin typeface="Microsoft YaHei"/>
                 <a:ea typeface="Microsoft YaHei"/>
               </a:rPr>
-              <a:t>生态启示</a:t>
+              <a:t>中英双语主题</a:t>
             </a:r>
           </a:p>
         </p:txBody>
@@ -4757,7 +4757,7 @@
                 <a:latin typeface="Microsoft YaHei"/>
                 <a:ea typeface="Microsoft YaHei"/>
               </a:rPr>
-              <a:t>核心口径</a:t>
+              <a:t>云平台×三家具身创业公司</a:t>
             </a:r>
           </a:p>
         </p:txBody>
@@ -4793,7 +4793,7 @@
                 <a:latin typeface="Microsoft YaHei"/>
                 <a:ea typeface="Microsoft YaHei"/>
               </a:rPr>
-              <a:t>四方结构覆盖云基础设施、Physical Agent、数据/AI科学、世界模型创业路径。</a:t>
+              <a:t>FermiOne Technology × Noematrix × Manifold AI × Alibaba Cloud: Frontier Dialogue on Embodied AI。</a:t>
             </a:r>
           </a:p>
         </p:txBody>
@@ -4872,7 +4872,7 @@
                 <a:latin typeface="Microsoft YaHei"/>
                 <a:ea typeface="Microsoft YaHei"/>
               </a:rPr>
-              <a:t>可落地动作：圆桌把PAI Physical AI从产品发布延伸为生态对话：Agent、数据管线、世界模型三类创业路径并列；回放画面以嘉宾阵容为主，技术细节更多依赖口述与同期全栈发布；价值在合作结构而非单页指标；对友商：用「平台能力 × 垂直标杆客户」组合讲述Physical AI，比单独堆叠开源模型列表更有说服力。</a:t>
+              <a:t>启示要点：圆桌把PAI Physical AI从产品发布延伸为生态对话：Agent、数据管线、世界模型三类创业路径并列；回放画面以嘉宾阵容为主，技术细节更多依赖口述与同期全栈发布；价值在合作结构而非单页指标；对友商：用「平台能力 × 垂直标杆客户」组合讲述Physical AI，比单独堆叠开源模型列表更有说服力。</a:t>
             </a:r>
           </a:p>
         </p:txBody>

--- a/yunqi-2026-pai-forum/docs/洞察一页-10-费莫一科技 × 穹彻智能 × 流形空间 × 阿里云：具身.pptx
+++ b/yunqi-2026-pai-forum/docs/洞察一页-10-费莫一科技 × 穹彻智能 × 流形空间 × 阿里云：具身.pptx
@@ -4872,7 +4872,7 @@
                 <a:latin typeface="Microsoft YaHei"/>
                 <a:ea typeface="Microsoft YaHei"/>
               </a:rPr>
-              <a:t>启示要点：圆桌把PAI Physical AI从产品发布延伸为生态对话：Agent、数据管线、世界模型三类创业路径并列；回放画面以嘉宾阵容为主，技术细节更多依赖口述与同期全栈发布；价值在合作结构而非单页指标；对友商：用「平台能力 × 垂直标杆客户」组合讲述Physical AI，比单独堆叠开源模型列表更有说服力。</a:t>
+              <a:t>启示要点：圆桌把PAI Physical AI从产品发布延伸为生态对话：Agent、数据管线、世界模型三类创业路径并列；回放画面以嘉宾阵容为主，技术细节更多依赖口述与同期全栈发布；价值在合作结构而非单页指标；用「平台能力 × 垂直标杆客户」组合讲述Physical AI，比单独堆叠开源模型列表更有说服力。</a:t>
             </a:r>
           </a:p>
         </p:txBody>
